--- a/classes/parte-7-red-team-y-operaciones-ofensivas/166-phishing-y-entrega-de-payloads/clase-166-presentacion.pptx
+++ b/classes/parte-7-red-team-y-operaciones-ofensivas/166-phishing-y-entrega-de-payloads/clase-166-presentacion.pptx
@@ -17,6 +17,9 @@
     <p:sldId id="265" r:id="rId16"/>
     <p:sldId id="266" r:id="rId17"/>
     <p:sldId id="267" r:id="rId18"/>
+    <p:sldId id="268" r:id="rId19"/>
+    <p:sldId id="269" r:id="rId20"/>
+    <p:sldId id="270" r:id="rId21"/>
   </p:sldIdLst>
   <p:sldSz cx="9144000" cy="6858000" type="screen4x3"/>
   <p:notesSz cx="6858000" cy="9144000"/>
@@ -3198,7 +3201,7 @@
                   <a:srgbClr val="0B3D2E"/>
                 </a:solidFill>
               </a:rPr>
-              <a:t>⚠️ Errores comunes</a:t>
+              <a:t>✍️ Ejercicios</a:t>
             </a:r>
           </a:p>
         </p:txBody>
@@ -3236,67 +3239,82 @@
                   <a:srgbClr val="22282E"/>
                 </a:solidFill>
               </a:rPr>
-              <a:t>•  El correo cae en spam — SPF/DKIM/DMARC mal configurados o dominio sin calentar; corrige registros</a:t>
-            </a:r>
-          </a:p>
-          <a:p>
-            <a:pPr>
-              <a:spcAft>
-                <a:spcPts val="600"/>
-              </a:spcAft>
-            </a:pPr>
-            <a:r>
-              <a:rPr sz="1500">
-                <a:solidFill>
-                  <a:srgbClr val="22282E"/>
-                </a:solidFill>
-              </a:rPr>
-              <a:t>•  Windows advierte "archivo de internet" — MOTW en el adjunto; usa contenedor ISO/VHD o smuggling</a:t>
-            </a:r>
-          </a:p>
-          <a:p>
-            <a:pPr>
-              <a:spcAft>
-                <a:spcPts val="600"/>
-              </a:spcAft>
-            </a:pPr>
-            <a:r>
-              <a:rPr sz="1500">
-                <a:solidFill>
-                  <a:srgbClr val="22282E"/>
-                </a:solidFill>
-              </a:rPr>
-              <a:t>•  El pretexto no genera clics — Poco creíble o mal segmentado; mejora OSINT y narrativa</a:t>
-            </a:r>
-          </a:p>
-          <a:p>
-            <a:pPr>
-              <a:spcAft>
-                <a:spcPts val="600"/>
-              </a:spcAft>
-            </a:pPr>
-            <a:r>
-              <a:rPr sz="1500">
-                <a:solidFill>
-                  <a:srgbClr val="22282E"/>
-                </a:solidFill>
-              </a:rPr>
-              <a:t>•  El proxy bloquea la descarga — Payload visible en la red; usa HTML smuggling</a:t>
-            </a:r>
-          </a:p>
-          <a:p>
-            <a:pPr>
-              <a:spcAft>
-                <a:spcPts val="600"/>
-              </a:spcAft>
-            </a:pPr>
-            <a:r>
-              <a:rPr sz="1500">
-                <a:solidFill>
-                  <a:srgbClr val="22282E"/>
-                </a:solidFill>
-              </a:rPr>
-              <a:t>•  Daño real a una persona — Pretexto abusivo; revisa la ética y coordina con la white cell</a:t>
+              <a:t>•  Redacta dos pretextos distintos y evalúa cuál es más creíble y por qué.</a:t>
+            </a:r>
+          </a:p>
+          <a:p>
+            <a:pPr>
+              <a:spcAft>
+                <a:spcPts val="600"/>
+              </a:spcAft>
+            </a:pPr>
+            <a:r>
+              <a:rPr sz="1500">
+                <a:solidFill>
+                  <a:srgbClr val="22282E"/>
+                </a:solidFill>
+              </a:rPr>
+              <a:t>•  Configura SPF/DKIM/DMARC en un dominio de prueba y valídalos.</a:t>
+            </a:r>
+          </a:p>
+          <a:p>
+            <a:pPr>
+              <a:spcAft>
+                <a:spcPts val="600"/>
+              </a:spcAft>
+            </a:pPr>
+            <a:r>
+              <a:rPr sz="1500">
+                <a:solidFill>
+                  <a:srgbClr val="22282E"/>
+                </a:solidFill>
+              </a:rPr>
+              <a:t>•  Explica cómo un contenedor ISO evade el Mark-of-the-Web.</a:t>
+            </a:r>
+          </a:p>
+          <a:p>
+            <a:pPr>
+              <a:spcAft>
+                <a:spcPts val="600"/>
+              </a:spcAft>
+            </a:pPr>
+            <a:r>
+              <a:rPr sz="1500">
+                <a:solidFill>
+                  <a:srgbClr val="22282E"/>
+                </a:solidFill>
+              </a:rPr>
+              <a:t>•  Describe el flujo de HTML smuggling paso a paso.</a:t>
+            </a:r>
+          </a:p>
+          <a:p>
+            <a:pPr>
+              <a:spcAft>
+                <a:spcPts val="600"/>
+              </a:spcAft>
+            </a:pPr>
+            <a:r>
+              <a:rPr sz="1500">
+                <a:solidFill>
+                  <a:srgbClr val="22282E"/>
+                </a:solidFill>
+              </a:rPr>
+              <a:t>•  Crea una campaña en GoPhish y explica cada métrica que reporta.</a:t>
+            </a:r>
+          </a:p>
+          <a:p>
+            <a:pPr>
+              <a:spcAft>
+                <a:spcPts val="600"/>
+              </a:spcAft>
+            </a:pPr>
+            <a:r>
+              <a:rPr sz="1500">
+                <a:solidFill>
+                  <a:srgbClr val="22282E"/>
+                </a:solidFill>
+              </a:rPr>
+              <a:t>•  Propón 3 reglas éticas propias para campañas contra personas reales.</a:t>
             </a:r>
           </a:p>
         </p:txBody>
@@ -3347,7 +3365,7 @@
                   <a:srgbClr val="0B3D2E"/>
                 </a:solidFill>
               </a:rPr>
-              <a:t>❓ Preguntas frecuentes</a:t>
+              <a:t>📝 Reto verificable</a:t>
             </a:r>
           </a:p>
         </p:txBody>
@@ -3385,82 +3403,22 @@
                   <a:srgbClr val="22282E"/>
                 </a:solidFill>
               </a:rPr>
-              <a:t>•  ❓ ¿El phishing sigue siendo el vector #1?</a:t>
-            </a:r>
-          </a:p>
-          <a:p>
-            <a:pPr>
-              <a:spcAft>
-                <a:spcPts val="600"/>
-              </a:spcAft>
-            </a:pPr>
-            <a:r>
-              <a:rPr sz="1500">
-                <a:solidFill>
-                  <a:srgbClr val="22282E"/>
-                </a:solidFill>
-              </a:rPr>
-              <a:t>•  Sí; sigue siendo de los accesos iniciales más efectivos y baratos, por eso es central en la emulación de casi cualquier actor.</a:t>
-            </a:r>
-          </a:p>
-          <a:p>
-            <a:pPr>
-              <a:spcAft>
-                <a:spcPts val="600"/>
-              </a:spcAft>
-            </a:pPr>
-            <a:r>
-              <a:rPr sz="1500">
-                <a:solidFill>
-                  <a:srgbClr val="22282E"/>
-                </a:solidFill>
-              </a:rPr>
-              <a:t>•  ❓ ¿Las macros de Office todavía funcionan?</a:t>
-            </a:r>
-          </a:p>
-          <a:p>
-            <a:pPr>
-              <a:spcAft>
-                <a:spcPts val="600"/>
-              </a:spcAft>
-            </a:pPr>
-            <a:r>
-              <a:rPr sz="1500">
-                <a:solidFill>
-                  <a:srgbClr val="22282E"/>
-                </a:solidFill>
-              </a:rPr>
-              <a:t>•  Cada vez menos: Microsoft bloquea macros de internet por defecto. Hoy dominan LNK en contenedores, HTML smuggling y abuso de instaladores.</a:t>
-            </a:r>
-          </a:p>
-          <a:p>
-            <a:pPr>
-              <a:spcAft>
-                <a:spcPts val="600"/>
-              </a:spcAft>
-            </a:pPr>
-            <a:r>
-              <a:rPr sz="1500">
-                <a:solidFill>
-                  <a:srgbClr val="22282E"/>
-                </a:solidFill>
-              </a:rPr>
-              <a:t>•  ❓ ¿Cómo evito dañar a las personas?</a:t>
-            </a:r>
-          </a:p>
-          <a:p>
-            <a:pPr>
-              <a:spcAft>
-                <a:spcPts val="600"/>
-              </a:spcAft>
-            </a:pPr>
-            <a:r>
-              <a:rPr sz="1500">
-                <a:solidFill>
-                  <a:srgbClr val="22282E"/>
-                </a:solidFill>
-              </a:rPr>
-              <a:t>•  Pretextos neutros, coordinación con la white cell, no explotar emociones sensibles y una fase de concienciación posterior en lugar de señalar culpables.</a:t>
+              <a:t>•  Ejecuta una campaña de phishing completa en tu laboratorio con GoPhish: pretexto, correo autenticado (SPF/DKIM), landing page y método de entrega que evada MOTW, midiendo apertura y clic.</a:t>
+            </a:r>
+          </a:p>
+          <a:p>
+            <a:pPr>
+              <a:spcAft>
+                <a:spcPts val="600"/>
+              </a:spcAft>
+            </a:pPr>
+            <a:r>
+              <a:rPr sz="1500">
+                <a:solidFill>
+                  <a:srgbClr val="22282E"/>
+                </a:solidFill>
+              </a:rPr>
+              <a:t>•  Criterio de aceptación: GoPhish reporta al menos un clic desde un buzón de lab, el correo pasa autenticación (no cae en spam por SPF/DKIM), y documentas por qué el método de entrega elegido evade una…</a:t>
             </a:r>
           </a:p>
         </p:txBody>
@@ -3511,7 +3469,7 @@
                   <a:srgbClr val="0B3D2E"/>
                 </a:solidFill>
               </a:rPr>
-              <a:t>🔗 Referencias</a:t>
+              <a:t>⚠️ Errores comunes</a:t>
             </a:r>
           </a:p>
         </p:txBody>
@@ -3549,6 +3507,319 @@
                   <a:srgbClr val="22282E"/>
                 </a:solidFill>
               </a:rPr>
+              <a:t>•  El correo cae en spam — SPF/DKIM/DMARC mal configurados o dominio sin calentar; corrige registros</a:t>
+            </a:r>
+          </a:p>
+          <a:p>
+            <a:pPr>
+              <a:spcAft>
+                <a:spcPts val="600"/>
+              </a:spcAft>
+            </a:pPr>
+            <a:r>
+              <a:rPr sz="1500">
+                <a:solidFill>
+                  <a:srgbClr val="22282E"/>
+                </a:solidFill>
+              </a:rPr>
+              <a:t>•  Windows advierte "archivo de internet" — MOTW en el adjunto; usa contenedor ISO/VHD o smuggling</a:t>
+            </a:r>
+          </a:p>
+          <a:p>
+            <a:pPr>
+              <a:spcAft>
+                <a:spcPts val="600"/>
+              </a:spcAft>
+            </a:pPr>
+            <a:r>
+              <a:rPr sz="1500">
+                <a:solidFill>
+                  <a:srgbClr val="22282E"/>
+                </a:solidFill>
+              </a:rPr>
+              <a:t>•  El pretexto no genera clics — Poco creíble o mal segmentado; mejora OSINT y narrativa</a:t>
+            </a:r>
+          </a:p>
+          <a:p>
+            <a:pPr>
+              <a:spcAft>
+                <a:spcPts val="600"/>
+              </a:spcAft>
+            </a:pPr>
+            <a:r>
+              <a:rPr sz="1500">
+                <a:solidFill>
+                  <a:srgbClr val="22282E"/>
+                </a:solidFill>
+              </a:rPr>
+              <a:t>•  El proxy bloquea la descarga — Payload visible en la red; usa HTML smuggling</a:t>
+            </a:r>
+          </a:p>
+          <a:p>
+            <a:pPr>
+              <a:spcAft>
+                <a:spcPts val="600"/>
+              </a:spcAft>
+            </a:pPr>
+            <a:r>
+              <a:rPr sz="1500">
+                <a:solidFill>
+                  <a:srgbClr val="22282E"/>
+                </a:solidFill>
+              </a:rPr>
+              <a:t>•  Daño real a una persona — Pretexto abusivo; revisa la ética y coordina con la white cell</a:t>
+            </a:r>
+          </a:p>
+        </p:txBody>
+      </p:sp>
+    </p:spTree>
+  </p:cSld>
+  <p:clrMapOvr>
+    <a:masterClrMapping/>
+  </p:clrMapOvr>
+</p:sld>
+</file>
+
+<file path=ppt/slides/slide13.xml><?xml version="1.0" encoding="utf-8"?>
+<p:sld xmlns:a="http://schemas.openxmlformats.org/drawingml/2006/main" xmlns:p="http://schemas.openxmlformats.org/presentationml/2006/main" xmlns:r="http://schemas.openxmlformats.org/officeDocument/2006/relationships">
+  <p:cSld>
+    <p:spTree>
+      <p:nvGrpSpPr>
+        <p:cNvPr id="1" name=""/>
+        <p:cNvGrpSpPr/>
+        <p:nvPr/>
+      </p:nvGrpSpPr>
+      <p:grpSpPr/>
+      <p:sp>
+        <p:nvSpPr>
+          <p:cNvPr id="2" name="TextBox 1"/>
+          <p:cNvSpPr txBox="1"/>
+          <p:nvPr/>
+        </p:nvSpPr>
+        <p:spPr>
+          <a:xfrm>
+            <a:off x="457200" y="320040"/>
+            <a:ext cx="8229600" cy="822960"/>
+          </a:xfrm>
+          <a:prstGeom prst="rect">
+            <a:avLst/>
+          </a:prstGeom>
+          <a:noFill/>
+        </p:spPr>
+        <p:txBody>
+          <a:bodyPr wrap="square">
+            <a:spAutoFit/>
+          </a:bodyPr>
+          <a:lstStyle/>
+          <a:p>
+            <a:r>
+              <a:rPr sz="2600" b="1">
+                <a:solidFill>
+                  <a:srgbClr val="0B3D2E"/>
+                </a:solidFill>
+              </a:rPr>
+              <a:t>❓ Preguntas frecuentes</a:t>
+            </a:r>
+          </a:p>
+        </p:txBody>
+      </p:sp>
+      <p:sp>
+        <p:nvSpPr>
+          <p:cNvPr id="3" name="TextBox 2"/>
+          <p:cNvSpPr txBox="1"/>
+          <p:nvPr/>
+        </p:nvSpPr>
+        <p:spPr>
+          <a:xfrm>
+            <a:off x="457200" y="1280160"/>
+            <a:ext cx="8229600" cy="4937760"/>
+          </a:xfrm>
+          <a:prstGeom prst="rect">
+            <a:avLst/>
+          </a:prstGeom>
+          <a:noFill/>
+        </p:spPr>
+        <p:txBody>
+          <a:bodyPr wrap="square">
+            <a:spAutoFit/>
+          </a:bodyPr>
+          <a:lstStyle/>
+          <a:p>
+            <a:pPr>
+              <a:spcAft>
+                <a:spcPts val="600"/>
+              </a:spcAft>
+            </a:pPr>
+            <a:r>
+              <a:rPr sz="1500">
+                <a:solidFill>
+                  <a:srgbClr val="22282E"/>
+                </a:solidFill>
+              </a:rPr>
+              <a:t>•  ❓ ¿El phishing sigue siendo el vector #1?</a:t>
+            </a:r>
+          </a:p>
+          <a:p>
+            <a:pPr>
+              <a:spcAft>
+                <a:spcPts val="600"/>
+              </a:spcAft>
+            </a:pPr>
+            <a:r>
+              <a:rPr sz="1500">
+                <a:solidFill>
+                  <a:srgbClr val="22282E"/>
+                </a:solidFill>
+              </a:rPr>
+              <a:t>•  Sí; sigue siendo de los accesos iniciales más efectivos y baratos, por eso es central en la emulación de casi cualquier actor.</a:t>
+            </a:r>
+          </a:p>
+          <a:p>
+            <a:pPr>
+              <a:spcAft>
+                <a:spcPts val="600"/>
+              </a:spcAft>
+            </a:pPr>
+            <a:r>
+              <a:rPr sz="1500">
+                <a:solidFill>
+                  <a:srgbClr val="22282E"/>
+                </a:solidFill>
+              </a:rPr>
+              <a:t>•  ❓ ¿Las macros de Office todavía funcionan?</a:t>
+            </a:r>
+          </a:p>
+          <a:p>
+            <a:pPr>
+              <a:spcAft>
+                <a:spcPts val="600"/>
+              </a:spcAft>
+            </a:pPr>
+            <a:r>
+              <a:rPr sz="1500">
+                <a:solidFill>
+                  <a:srgbClr val="22282E"/>
+                </a:solidFill>
+              </a:rPr>
+              <a:t>•  Cada vez menos: Microsoft bloquea macros de internet por defecto. Hoy dominan LNK en contenedores, HTML smuggling y abuso de instaladores.</a:t>
+            </a:r>
+          </a:p>
+          <a:p>
+            <a:pPr>
+              <a:spcAft>
+                <a:spcPts val="600"/>
+              </a:spcAft>
+            </a:pPr>
+            <a:r>
+              <a:rPr sz="1500">
+                <a:solidFill>
+                  <a:srgbClr val="22282E"/>
+                </a:solidFill>
+              </a:rPr>
+              <a:t>•  ❓ ¿Cómo evito dañar a las personas?</a:t>
+            </a:r>
+          </a:p>
+          <a:p>
+            <a:pPr>
+              <a:spcAft>
+                <a:spcPts val="600"/>
+              </a:spcAft>
+            </a:pPr>
+            <a:r>
+              <a:rPr sz="1500">
+                <a:solidFill>
+                  <a:srgbClr val="22282E"/>
+                </a:solidFill>
+              </a:rPr>
+              <a:t>•  Pretextos neutros, coordinación con la white cell, no explotar emociones sensibles y una fase de concienciación posterior en lugar de señalar culpables.</a:t>
+            </a:r>
+          </a:p>
+        </p:txBody>
+      </p:sp>
+    </p:spTree>
+  </p:cSld>
+  <p:clrMapOvr>
+    <a:masterClrMapping/>
+  </p:clrMapOvr>
+</p:sld>
+</file>
+
+<file path=ppt/slides/slide14.xml><?xml version="1.0" encoding="utf-8"?>
+<p:sld xmlns:a="http://schemas.openxmlformats.org/drawingml/2006/main" xmlns:p="http://schemas.openxmlformats.org/presentationml/2006/main" xmlns:r="http://schemas.openxmlformats.org/officeDocument/2006/relationships">
+  <p:cSld>
+    <p:spTree>
+      <p:nvGrpSpPr>
+        <p:cNvPr id="1" name=""/>
+        <p:cNvGrpSpPr/>
+        <p:nvPr/>
+      </p:nvGrpSpPr>
+      <p:grpSpPr/>
+      <p:sp>
+        <p:nvSpPr>
+          <p:cNvPr id="2" name="TextBox 1"/>
+          <p:cNvSpPr txBox="1"/>
+          <p:nvPr/>
+        </p:nvSpPr>
+        <p:spPr>
+          <a:xfrm>
+            <a:off x="457200" y="320040"/>
+            <a:ext cx="8229600" cy="822960"/>
+          </a:xfrm>
+          <a:prstGeom prst="rect">
+            <a:avLst/>
+          </a:prstGeom>
+          <a:noFill/>
+        </p:spPr>
+        <p:txBody>
+          <a:bodyPr wrap="square">
+            <a:spAutoFit/>
+          </a:bodyPr>
+          <a:lstStyle/>
+          <a:p>
+            <a:r>
+              <a:rPr sz="2600" b="1">
+                <a:solidFill>
+                  <a:srgbClr val="0B3D2E"/>
+                </a:solidFill>
+              </a:rPr>
+              <a:t>🔗 Referencias</a:t>
+            </a:r>
+          </a:p>
+        </p:txBody>
+      </p:sp>
+      <p:sp>
+        <p:nvSpPr>
+          <p:cNvPr id="3" name="TextBox 2"/>
+          <p:cNvSpPr txBox="1"/>
+          <p:nvPr/>
+        </p:nvSpPr>
+        <p:spPr>
+          <a:xfrm>
+            <a:off x="457200" y="1280160"/>
+            <a:ext cx="8229600" cy="4937760"/>
+          </a:xfrm>
+          <a:prstGeom prst="rect">
+            <a:avLst/>
+          </a:prstGeom>
+          <a:noFill/>
+        </p:spPr>
+        <p:txBody>
+          <a:bodyPr wrap="square">
+            <a:spAutoFit/>
+          </a:bodyPr>
+          <a:lstStyle/>
+          <a:p>
+            <a:pPr>
+              <a:spcAft>
+                <a:spcPts val="600"/>
+              </a:spcAft>
+            </a:pPr>
+            <a:r>
+              <a:rPr sz="1500">
+                <a:solidFill>
+                  <a:srgbClr val="22282E"/>
+                </a:solidFill>
+              </a:rPr>
               <a:t>•  MITRE ATT&amp;CK — Phishing (T1566). &lt;https://attack.mitre.org/techniques/T1566/&gt;</a:t>
             </a:r>
           </a:p>
@@ -3599,6 +3870,81 @@
           </a:p>
         </p:txBody>
       </p:sp>
+    </p:spTree>
+  </p:cSld>
+  <p:clrMapOvr>
+    <a:masterClrMapping/>
+  </p:clrMapOvr>
+</p:sld>
+</file>
+
+<file path=ppt/slides/slide15.xml><?xml version="1.0" encoding="utf-8"?>
+<p:sld xmlns:a="http://schemas.openxmlformats.org/drawingml/2006/main" xmlns:p="http://schemas.openxmlformats.org/presentationml/2006/main" xmlns:r="http://schemas.openxmlformats.org/officeDocument/2006/relationships">
+  <p:cSld>
+    <p:spTree>
+      <p:nvGrpSpPr>
+        <p:cNvPr id="1" name=""/>
+        <p:cNvGrpSpPr/>
+        <p:nvPr/>
+      </p:nvGrpSpPr>
+      <p:grpSpPr/>
+      <p:sp>
+        <p:nvSpPr>
+          <p:cNvPr id="2" name="TextBox 1"/>
+          <p:cNvSpPr txBox="1"/>
+          <p:nvPr/>
+        </p:nvSpPr>
+        <p:spPr>
+          <a:xfrm>
+            <a:off x="457200" y="274320"/>
+            <a:ext cx="8229600" cy="640080"/>
+          </a:xfrm>
+          <a:prstGeom prst="rect">
+            <a:avLst/>
+          </a:prstGeom>
+          <a:noFill/>
+        </p:spPr>
+        <p:txBody>
+          <a:bodyPr wrap="square">
+            <a:spAutoFit/>
+          </a:bodyPr>
+          <a:lstStyle/>
+          <a:p>
+            <a:r>
+              <a:rPr sz="2200" b="1">
+                <a:solidFill>
+                  <a:srgbClr val="0B3D2E"/>
+                </a:solidFill>
+              </a:rPr>
+              <a:t>Diagrama de la clase</a:t>
+            </a:r>
+          </a:p>
+        </p:txBody>
+      </p:sp>
+      <p:pic>
+        <p:nvPicPr>
+          <p:cNvPr id="3" name="Picture 2" descr="fe738545710f7252.png"/>
+          <p:cNvPicPr>
+            <a:picLocks noChangeAspect="1"/>
+          </p:cNvPicPr>
+          <p:nvPr/>
+        </p:nvPicPr>
+        <p:blipFill>
+          <a:blip r:embed="rId2"/>
+          <a:stretch>
+            <a:fillRect/>
+          </a:stretch>
+        </p:blipFill>
+        <p:spPr>
+          <a:xfrm>
+            <a:off x="2737334" y="1097280"/>
+            <a:ext cx="3669331" cy="5303520"/>
+          </a:xfrm>
+          <a:prstGeom prst="rect">
+            <a:avLst/>
+          </a:prstGeom>
+        </p:spPr>
+      </p:pic>
     </p:spTree>
   </p:cSld>
   <p:clrMapOvr>
@@ -3683,7 +4029,7 @@
                   <a:srgbClr val="22282E"/>
                 </a:solidFill>
               </a:rPr>
-              <a:t>•  Diseñar y ejecutar campañas de phishing controladas como vector de acceso inicial: pretextos creíbles, infraestructura de correo con buena reputación, y payloads que superen los filtros sin quemar la operación. El alumno aprenderá los formatos de entrega modernos (contenedores ISO/LNK, macros, HTML smuggling) y cómo medir la campaña sin dañar a las personas objetivo.</a:t>
+              <a:t>•  Diseñar y ejecutar campañas de phishing controladas como vector de acceso inicial: pretextos creíbles, infraestructura de correo con buena reputación, y payloads que superen los filtros sin quemar la…</a:t>
             </a:r>
           </a:p>
         </p:txBody>
@@ -4077,7 +4423,7 @@
                   <a:srgbClr val="0B3D2E"/>
                 </a:solidFill>
               </a:rPr>
-              <a:t>📖 Definiciones y características</a:t>
+              <a:t>🧠 Explicación en profundidad</a:t>
             </a:r>
           </a:p>
         </p:txBody>
@@ -4115,82 +4461,67 @@
                   <a:srgbClr val="22282E"/>
                 </a:solidFill>
               </a:rPr>
-              <a:t>•  Spear phishing (T1566.001): correo dirigido con adjunto/enlace a personas concretas. Característica: alta tasa de éxito por personalización.</a:t>
-            </a:r>
-          </a:p>
-          <a:p>
-            <a:pPr>
-              <a:spcAft>
-                <a:spcPts val="600"/>
-              </a:spcAft>
-            </a:pPr>
-            <a:r>
-              <a:rPr sz="1500">
-                <a:solidFill>
-                  <a:srgbClr val="22282E"/>
-                </a:solidFill>
-              </a:rPr>
-              <a:t>•  Pretexto: historia que motiva la acción (factura, RRHH, IT). Característica: debe ser coherente con OSINT del objetivo.</a:t>
-            </a:r>
-          </a:p>
-          <a:p>
-            <a:pPr>
-              <a:spcAft>
-                <a:spcPts val="600"/>
-              </a:spcAft>
-            </a:pPr>
-            <a:r>
-              <a:rPr sz="1500">
-                <a:solidFill>
-                  <a:srgbClr val="22282E"/>
-                </a:solidFill>
-              </a:rPr>
-              <a:t>•  Mark-of-the-Web (MOTW): marca que Windows pone a archivos de internet. Característica: dispara advertencias; los contenedores (ISO) la evaden.</a:t>
-            </a:r>
-          </a:p>
-          <a:p>
-            <a:pPr>
-              <a:spcAft>
-                <a:spcPts val="600"/>
-              </a:spcAft>
-            </a:pPr>
-            <a:r>
-              <a:rPr sz="1500">
-                <a:solidFill>
-                  <a:srgbClr val="22282E"/>
-                </a:solidFill>
-              </a:rPr>
-              <a:t>•  HTML smuggling: reconstruir el payload en el navegador vía JS/Blob para evadir proxies. Característica: el binario no viaja por la red como tal.</a:t>
-            </a:r>
-          </a:p>
-          <a:p>
-            <a:pPr>
-              <a:spcAft>
-                <a:spcPts val="600"/>
-              </a:spcAft>
-            </a:pPr>
-            <a:r>
-              <a:rPr sz="1500">
-                <a:solidFill>
-                  <a:srgbClr val="22282E"/>
-                </a:solidFill>
-              </a:rPr>
-              <a:t>•  SPF/DKIM/DMARC: mecanismos de autenticación de correo. Característica: bien configurados mejoran la entregabilidad del phishing legítimo del ejercicio.</a:t>
-            </a:r>
-          </a:p>
-          <a:p>
-            <a:pPr>
-              <a:spcAft>
-                <a:spcPts val="600"/>
-              </a:spcAft>
-            </a:pPr>
-            <a:r>
-              <a:rPr sz="1500">
-                <a:solidFill>
-                  <a:srgbClr val="22282E"/>
-                </a:solidFill>
-              </a:rPr>
-              <a:t>•  Landing page: página que captura credenciales o entrega el payload. Característica: clona un servicio conocido de forma controlada.</a:t>
+              <a:t>•  El phishing sigue encabezando los informes de acceso inicial año tras año no porque sea sofisticado, sino porque ataca la capa que ningún parche cubre del todo: la decisión humana. Entender por qué…</a:t>
+            </a:r>
+          </a:p>
+          <a:p>
+            <a:pPr>
+              <a:spcAft>
+                <a:spcPts val="600"/>
+              </a:spcAft>
+            </a:pPr>
+            <a:r>
+              <a:rPr sz="1500">
+                <a:solidFill>
+                  <a:srgbClr val="22282E"/>
+                </a:solidFill>
+              </a:rPr>
+              <a:t>•  Antes que ningún fichero, lo que se "programa" es una historia. Un pretexto creíble se apoya en tres palancas psicológicas —autoridad ("es de IT"), urgencia ("caduca hoy") y familiaridad ("el portal…</a:t>
+            </a:r>
+          </a:p>
+          <a:p>
+            <a:pPr>
+              <a:spcAft>
+                <a:spcPts val="600"/>
+              </a:spcAft>
+            </a:pPr>
+            <a:r>
+              <a:rPr sz="1500">
+                <a:solidFill>
+                  <a:srgbClr val="22282E"/>
+                </a:solidFill>
+              </a:rPr>
+              <a:t>•  Un correo no se juzga solo por su texto; el receptor evalúa quién lo envía. Los tres registros DNS de autenticación deciden esa confianza: SPF declara qué servidores pueden enviar en nombre del…</a:t>
+            </a:r>
+          </a:p>
+          <a:p>
+            <a:pPr>
+              <a:spcAft>
+                <a:spcPts val="600"/>
+              </a:spcAft>
+            </a:pPr>
+            <a:r>
+              <a:rPr sz="1500">
+                <a:solidFill>
+                  <a:srgbClr val="22282E"/>
+                </a:solidFill>
+              </a:rPr>
+              <a:t>•  Cuando Windows descarga un fichero de internet le adhiere una marca, el Mark-of-the-Web (MOTW), que activa advertencias y bloquea macros. Toda la evolución de los formatos de entrega es, en el fondo…</a:t>
+            </a:r>
+          </a:p>
+          <a:p>
+            <a:pPr>
+              <a:spcAft>
+                <a:spcPts val="600"/>
+              </a:spcAft>
+            </a:pPr>
+            <a:r>
+              <a:rPr sz="1500">
+                <a:solidFill>
+                  <a:srgbClr val="22282E"/>
+                </a:solidFill>
+              </a:rPr>
+              <a:t>•  El entregable de una campaña no son "víctimas", son métricas: tasa de apertura, de clic y de entrega de credenciales. Herramientas como GoPhish las capturan de forma controlada. Pero la medición…</a:t>
             </a:r>
           </a:p>
         </p:txBody>
@@ -4241,7 +4572,7 @@
                   <a:srgbClr val="0B3D2E"/>
                 </a:solidFill>
               </a:rPr>
-              <a:t>🧰 Herramientas y preparación</a:t>
+              <a:t>📖 Definiciones y características</a:t>
             </a:r>
           </a:p>
         </p:txBody>
@@ -4279,67 +4610,82 @@
                   <a:srgbClr val="22282E"/>
                 </a:solidFill>
               </a:rPr>
-              <a:t>•  GoPhish para gestionar la campaña y métricas.</a:t>
-            </a:r>
-          </a:p>
-          <a:p>
-            <a:pPr>
-              <a:spcAft>
-                <a:spcPts val="600"/>
-              </a:spcAft>
-            </a:pPr>
-            <a:r>
-              <a:rPr sz="1500">
-                <a:solidFill>
-                  <a:srgbClr val="22282E"/>
-                </a:solidFill>
-              </a:rPr>
-              <a:t>•  Un dominio de práctica con registros SPF/DKIM/DMARC configurados (en tu lab o dominio propio).</a:t>
-            </a:r>
-          </a:p>
-          <a:p>
-            <a:pPr>
-              <a:spcAft>
-                <a:spcPts val="600"/>
-              </a:spcAft>
-            </a:pPr>
-            <a:r>
-              <a:rPr sz="1500">
-                <a:solidFill>
-                  <a:srgbClr val="22282E"/>
-                </a:solidFill>
-              </a:rPr>
-              <a:t>•  El C2 de las clases anteriores para el payload de la landing.</a:t>
-            </a:r>
-          </a:p>
-          <a:p>
-            <a:pPr>
-              <a:spcAft>
-                <a:spcPts val="600"/>
-              </a:spcAft>
-            </a:pPr>
-            <a:r>
-              <a:rPr sz="1500">
-                <a:solidFill>
-                  <a:srgbClr val="22282E"/>
-                </a:solidFill>
-              </a:rPr>
-              <a:t>•  Herramientas de generación de contenedores/LNK en un entorno controlado.</a:t>
-            </a:r>
-          </a:p>
-          <a:p>
-            <a:pPr>
-              <a:spcAft>
-                <a:spcPts val="600"/>
-              </a:spcAft>
-            </a:pPr>
-            <a:r>
-              <a:rPr sz="1500">
-                <a:solidFill>
-                  <a:srgbClr val="22282E"/>
-                </a:solidFill>
-              </a:rPr>
-              <a:t>•  Buzones de "víctima" de laboratorio (cuentas de prueba que tú controlas).</a:t>
+              <a:t>•  Spear phishing (T1566.001): correo dirigido con adjunto/enlace a personas concretas. Característica: alta tasa de éxito por personalización.</a:t>
+            </a:r>
+          </a:p>
+          <a:p>
+            <a:pPr>
+              <a:spcAft>
+                <a:spcPts val="600"/>
+              </a:spcAft>
+            </a:pPr>
+            <a:r>
+              <a:rPr sz="1500">
+                <a:solidFill>
+                  <a:srgbClr val="22282E"/>
+                </a:solidFill>
+              </a:rPr>
+              <a:t>•  Pretexto: historia que motiva la acción (factura, RRHH, IT). Característica: debe ser coherente con OSINT del objetivo.</a:t>
+            </a:r>
+          </a:p>
+          <a:p>
+            <a:pPr>
+              <a:spcAft>
+                <a:spcPts val="600"/>
+              </a:spcAft>
+            </a:pPr>
+            <a:r>
+              <a:rPr sz="1500">
+                <a:solidFill>
+                  <a:srgbClr val="22282E"/>
+                </a:solidFill>
+              </a:rPr>
+              <a:t>•  Mark-of-the-Web (MOTW): marca que Windows pone a archivos de internet. Característica: dispara advertencias; los contenedores (ISO) la evaden.</a:t>
+            </a:r>
+          </a:p>
+          <a:p>
+            <a:pPr>
+              <a:spcAft>
+                <a:spcPts val="600"/>
+              </a:spcAft>
+            </a:pPr>
+            <a:r>
+              <a:rPr sz="1500">
+                <a:solidFill>
+                  <a:srgbClr val="22282E"/>
+                </a:solidFill>
+              </a:rPr>
+              <a:t>•  HTML smuggling: reconstruir el payload en el navegador vía JS/Blob para evadir proxies. Característica: el binario no viaja por la red como tal.</a:t>
+            </a:r>
+          </a:p>
+          <a:p>
+            <a:pPr>
+              <a:spcAft>
+                <a:spcPts val="600"/>
+              </a:spcAft>
+            </a:pPr>
+            <a:r>
+              <a:rPr sz="1500">
+                <a:solidFill>
+                  <a:srgbClr val="22282E"/>
+                </a:solidFill>
+              </a:rPr>
+              <a:t>•  SPF/DKIM/DMARC: mecanismos de autenticación de correo. Característica: bien configurados mejoran la entregabilidad del phishing legítimo del ejercicio.</a:t>
+            </a:r>
+          </a:p>
+          <a:p>
+            <a:pPr>
+              <a:spcAft>
+                <a:spcPts val="600"/>
+              </a:spcAft>
+            </a:pPr>
+            <a:r>
+              <a:rPr sz="1500">
+                <a:solidFill>
+                  <a:srgbClr val="22282E"/>
+                </a:solidFill>
+              </a:rPr>
+              <a:t>•  Landing page: página que captura credenciales o entrega el payload. Característica: clona un servicio conocido de forma controlada.</a:t>
             </a:r>
           </a:p>
         </p:txBody>
@@ -4390,7 +4736,7 @@
                   <a:srgbClr val="0B3D2E"/>
                 </a:solidFill>
               </a:rPr>
-              <a:t>🧪 Laboratorio guiado</a:t>
+              <a:t>📔 Glosario</a:t>
             </a:r>
           </a:p>
         </p:txBody>
@@ -4428,97 +4774,97 @@
                   <a:srgbClr val="22282E"/>
                 </a:solidFill>
               </a:rPr>
-              <a:t>•  OSINT del objetivo ficticio. Reúne (de fuentes públicas del lab) nombres, roles y el estilo de correo de "ACME Corp".</a:t>
-            </a:r>
-          </a:p>
-          <a:p>
-            <a:pPr>
-              <a:spcAft>
-                <a:spcPts val="600"/>
-              </a:spcAft>
-            </a:pPr>
-            <a:r>
-              <a:rPr sz="1500">
-                <a:solidFill>
-                  <a:srgbClr val="22282E"/>
-                </a:solidFill>
-              </a:rPr>
-              <a:t>•  Monta GoPhish. Descarga y ejecuta el binario; crea un Sending Profile con tu servidor SMTP de lab.</a:t>
-            </a:r>
-          </a:p>
-          <a:p>
-            <a:pPr>
-              <a:spcAft>
-                <a:spcPts val="600"/>
-              </a:spcAft>
-            </a:pPr>
-            <a:r>
-              <a:rPr sz="1500">
-                <a:solidFill>
-                  <a:srgbClr val="22282E"/>
-                </a:solidFill>
-              </a:rPr>
-              <a:t>•  Configura reputación. Añade SPF, DKIM y DMARC al dominio de práctica y verifica con dig TXT que resuelven.</a:t>
-            </a:r>
-          </a:p>
-          <a:p>
-            <a:pPr>
-              <a:spcAft>
-                <a:spcPts val="600"/>
-              </a:spcAft>
-            </a:pPr>
-            <a:r>
-              <a:rPr sz="1500">
-                <a:solidFill>
-                  <a:srgbClr val="22282E"/>
-                </a:solidFill>
-              </a:rPr>
-              <a:t>•  Redacta el pretexto. Un correo de "actualización de portal de RRHH" con enlace a tu landing; cuida gramática, firma y coherencia.</a:t>
-            </a:r>
-          </a:p>
-          <a:p>
-            <a:pPr>
-              <a:spcAft>
-                <a:spcPts val="600"/>
-              </a:spcAft>
-            </a:pPr>
-            <a:r>
-              <a:rPr sz="1500">
-                <a:solidFill>
-                  <a:srgbClr val="22282E"/>
-                </a:solidFill>
-              </a:rPr>
-              <a:t>•  Crea la landing page. Clona (en tu lab) la pantalla de login del "portal" y captura credenciales o entrega el payload C2.</a:t>
-            </a:r>
-          </a:p>
-          <a:p>
-            <a:pPr>
-              <a:spcAft>
-                <a:spcPts val="600"/>
-              </a:spcAft>
-            </a:pPr>
-            <a:r>
-              <a:rPr sz="1500">
-                <a:solidFill>
-                  <a:srgbClr val="22282E"/>
-                </a:solidFill>
-              </a:rPr>
-              <a:t>•  Elige la entrega. Compara enviar un .lnk dentro de un .iso (evade MOTW) frente a HTML smuggling; documenta pros/cons de cada uno.</a:t>
-            </a:r>
-          </a:p>
-          <a:p>
-            <a:pPr>
-              <a:spcAft>
-                <a:spcPts val="600"/>
-              </a:spcAft>
-            </a:pPr>
-            <a:r>
-              <a:rPr sz="1500">
-                <a:solidFill>
-                  <a:srgbClr val="22282E"/>
-                </a:solidFill>
-              </a:rPr>
-              <a:t>•  Lanza y mide. Envía a los buzones de laboratorio; en GoPhish observa tasas de apertura, clic y envío de credenciales. Limpia al terminar.</a:t>
+              <a:t>•  Término — Definición concisa</a:t>
+            </a:r>
+          </a:p>
+          <a:p>
+            <a:pPr>
+              <a:spcAft>
+                <a:spcPts val="600"/>
+              </a:spcAft>
+            </a:pPr>
+            <a:r>
+              <a:rPr sz="1500">
+                <a:solidFill>
+                  <a:srgbClr val="22282E"/>
+                </a:solidFill>
+              </a:rPr>
+              <a:t>•  Phishing (T1566) — Envío de mensajes engañosos para inducir una acción (clic, credenciales, ejecución)</a:t>
+            </a:r>
+          </a:p>
+          <a:p>
+            <a:pPr>
+              <a:spcAft>
+                <a:spcPts val="600"/>
+              </a:spcAft>
+            </a:pPr>
+            <a:r>
+              <a:rPr sz="1500">
+                <a:solidFill>
+                  <a:srgbClr val="22282E"/>
+                </a:solidFill>
+              </a:rPr>
+              <a:t>•  Spear phishing — Phishing dirigido y personalizado contra personas u organizaciones concretas</a:t>
+            </a:r>
+          </a:p>
+          <a:p>
+            <a:pPr>
+              <a:spcAft>
+                <a:spcPts val="600"/>
+              </a:spcAft>
+            </a:pPr>
+            <a:r>
+              <a:rPr sz="1500">
+                <a:solidFill>
+                  <a:srgbClr val="22282E"/>
+                </a:solidFill>
+              </a:rPr>
+              <a:t>•  Pretexto — Historia que motiva la acción del objetivo; el verdadero "exploit" de la campaña</a:t>
+            </a:r>
+          </a:p>
+          <a:p>
+            <a:pPr>
+              <a:spcAft>
+                <a:spcPts val="600"/>
+              </a:spcAft>
+            </a:pPr>
+            <a:r>
+              <a:rPr sz="1500">
+                <a:solidFill>
+                  <a:srgbClr val="22282E"/>
+                </a:solidFill>
+              </a:rPr>
+              <a:t>•  OSINT — Recogida de información de fuentes públicas para dar verosimilitud al pretexto</a:t>
+            </a:r>
+          </a:p>
+          <a:p>
+            <a:pPr>
+              <a:spcAft>
+                <a:spcPts val="600"/>
+              </a:spcAft>
+            </a:pPr>
+            <a:r>
+              <a:rPr sz="1500">
+                <a:solidFill>
+                  <a:srgbClr val="22282E"/>
+                </a:solidFill>
+              </a:rPr>
+              <a:t>•  SPF — Registro DNS que declara qué servidores pueden enviar correo en nombre del dominio</a:t>
+            </a:r>
+          </a:p>
+          <a:p>
+            <a:pPr>
+              <a:spcAft>
+                <a:spcPts val="600"/>
+              </a:spcAft>
+            </a:pPr>
+            <a:r>
+              <a:rPr sz="1500">
+                <a:solidFill>
+                  <a:srgbClr val="22282E"/>
+                </a:solidFill>
+              </a:rPr>
+              <a:t>•  DKIM — Firma criptográfica del correo que prueba que no se alteró en tránsito</a:t>
             </a:r>
           </a:p>
         </p:txBody>
@@ -4569,7 +4915,7 @@
                   <a:srgbClr val="0B3D2E"/>
                 </a:solidFill>
               </a:rPr>
-              <a:t>✍️ Ejercicios</a:t>
+              <a:t>🧰 Herramientas y preparación</a:t>
             </a:r>
           </a:p>
         </p:txBody>
@@ -4607,82 +4953,67 @@
                   <a:srgbClr val="22282E"/>
                 </a:solidFill>
               </a:rPr>
-              <a:t>•  Redacta dos pretextos distintos y evalúa cuál es más creíble y por qué.</a:t>
-            </a:r>
-          </a:p>
-          <a:p>
-            <a:pPr>
-              <a:spcAft>
-                <a:spcPts val="600"/>
-              </a:spcAft>
-            </a:pPr>
-            <a:r>
-              <a:rPr sz="1500">
-                <a:solidFill>
-                  <a:srgbClr val="22282E"/>
-                </a:solidFill>
-              </a:rPr>
-              <a:t>•  Configura SPF/DKIM/DMARC en un dominio de prueba y valídalos.</a:t>
-            </a:r>
-          </a:p>
-          <a:p>
-            <a:pPr>
-              <a:spcAft>
-                <a:spcPts val="600"/>
-              </a:spcAft>
-            </a:pPr>
-            <a:r>
-              <a:rPr sz="1500">
-                <a:solidFill>
-                  <a:srgbClr val="22282E"/>
-                </a:solidFill>
-              </a:rPr>
-              <a:t>•  Explica cómo un contenedor ISO evade el Mark-of-the-Web.</a:t>
-            </a:r>
-          </a:p>
-          <a:p>
-            <a:pPr>
-              <a:spcAft>
-                <a:spcPts val="600"/>
-              </a:spcAft>
-            </a:pPr>
-            <a:r>
-              <a:rPr sz="1500">
-                <a:solidFill>
-                  <a:srgbClr val="22282E"/>
-                </a:solidFill>
-              </a:rPr>
-              <a:t>•  Describe el flujo de HTML smuggling paso a paso.</a:t>
-            </a:r>
-          </a:p>
-          <a:p>
-            <a:pPr>
-              <a:spcAft>
-                <a:spcPts val="600"/>
-              </a:spcAft>
-            </a:pPr>
-            <a:r>
-              <a:rPr sz="1500">
-                <a:solidFill>
-                  <a:srgbClr val="22282E"/>
-                </a:solidFill>
-              </a:rPr>
-              <a:t>•  Crea una campaña en GoPhish y explica cada métrica que reporta.</a:t>
-            </a:r>
-          </a:p>
-          <a:p>
-            <a:pPr>
-              <a:spcAft>
-                <a:spcPts val="600"/>
-              </a:spcAft>
-            </a:pPr>
-            <a:r>
-              <a:rPr sz="1500">
-                <a:solidFill>
-                  <a:srgbClr val="22282E"/>
-                </a:solidFill>
-              </a:rPr>
-              <a:t>•  Propón 3 reglas éticas propias para campañas contra personas reales.</a:t>
+              <a:t>•  GoPhish para gestionar la campaña y métricas.</a:t>
+            </a:r>
+          </a:p>
+          <a:p>
+            <a:pPr>
+              <a:spcAft>
+                <a:spcPts val="600"/>
+              </a:spcAft>
+            </a:pPr>
+            <a:r>
+              <a:rPr sz="1500">
+                <a:solidFill>
+                  <a:srgbClr val="22282E"/>
+                </a:solidFill>
+              </a:rPr>
+              <a:t>•  Un dominio de práctica con registros SPF/DKIM/DMARC configurados (en tu lab o dominio propio).</a:t>
+            </a:r>
+          </a:p>
+          <a:p>
+            <a:pPr>
+              <a:spcAft>
+                <a:spcPts val="600"/>
+              </a:spcAft>
+            </a:pPr>
+            <a:r>
+              <a:rPr sz="1500">
+                <a:solidFill>
+                  <a:srgbClr val="22282E"/>
+                </a:solidFill>
+              </a:rPr>
+              <a:t>•  El C2 de las clases anteriores para el payload de la landing.</a:t>
+            </a:r>
+          </a:p>
+          <a:p>
+            <a:pPr>
+              <a:spcAft>
+                <a:spcPts val="600"/>
+              </a:spcAft>
+            </a:pPr>
+            <a:r>
+              <a:rPr sz="1500">
+                <a:solidFill>
+                  <a:srgbClr val="22282E"/>
+                </a:solidFill>
+              </a:rPr>
+              <a:t>•  Herramientas de generación de contenedores/LNK en un entorno controlado.</a:t>
+            </a:r>
+          </a:p>
+          <a:p>
+            <a:pPr>
+              <a:spcAft>
+                <a:spcPts val="600"/>
+              </a:spcAft>
+            </a:pPr>
+            <a:r>
+              <a:rPr sz="1500">
+                <a:solidFill>
+                  <a:srgbClr val="22282E"/>
+                </a:solidFill>
+              </a:rPr>
+              <a:t>•  Buzones de "víctima" de laboratorio (cuentas de prueba que tú controlas).</a:t>
             </a:r>
           </a:p>
         </p:txBody>
@@ -4733,7 +5064,7 @@
                   <a:srgbClr val="0B3D2E"/>
                 </a:solidFill>
               </a:rPr>
-              <a:t>📝 Reto verificable</a:t>
+              <a:t>🧪 Laboratorio guiado</a:t>
             </a:r>
           </a:p>
         </p:txBody>
@@ -4771,22 +5102,97 @@
                   <a:srgbClr val="22282E"/>
                 </a:solidFill>
               </a:rPr>
-              <a:t>•  Ejecuta una campaña de phishing completa en tu laboratorio con GoPhish: pretexto, correo autenticado (SPF/DKIM), landing page y método de entrega que evada MOTW, midiendo apertura y clic.</a:t>
-            </a:r>
-          </a:p>
-          <a:p>
-            <a:pPr>
-              <a:spcAft>
-                <a:spcPts val="600"/>
-              </a:spcAft>
-            </a:pPr>
-            <a:r>
-              <a:rPr sz="1500">
-                <a:solidFill>
-                  <a:srgbClr val="22282E"/>
-                </a:solidFill>
-              </a:rPr>
-              <a:t>•  Criterio de aceptación: GoPhish reporta al menos un clic desde un buzón de lab, el correo pasa autenticación (no cae en spam por SPF/DKIM), y documentas por qué el método de entrega elegido evade una advertencia de Windows. Todo sobre buzones que controlas.</a:t>
+              <a:t>•  OSINT del objetivo ficticio. Reúne (de fuentes públicas del lab) nombres, roles y el estilo de correo de "ACME Corp".</a:t>
+            </a:r>
+          </a:p>
+          <a:p>
+            <a:pPr>
+              <a:spcAft>
+                <a:spcPts val="600"/>
+              </a:spcAft>
+            </a:pPr>
+            <a:r>
+              <a:rPr sz="1500">
+                <a:solidFill>
+                  <a:srgbClr val="22282E"/>
+                </a:solidFill>
+              </a:rPr>
+              <a:t>•  Monta GoPhish. Descarga y ejecuta el binario; crea un Sending Profile con tu servidor SMTP de lab.</a:t>
+            </a:r>
+          </a:p>
+          <a:p>
+            <a:pPr>
+              <a:spcAft>
+                <a:spcPts val="600"/>
+              </a:spcAft>
+            </a:pPr>
+            <a:r>
+              <a:rPr sz="1500">
+                <a:solidFill>
+                  <a:srgbClr val="22282E"/>
+                </a:solidFill>
+              </a:rPr>
+              <a:t>•  Configura reputación. Añade SPF, DKIM y DMARC al dominio de práctica y verifica con dig TXT que resuelven.</a:t>
+            </a:r>
+          </a:p>
+          <a:p>
+            <a:pPr>
+              <a:spcAft>
+                <a:spcPts val="600"/>
+              </a:spcAft>
+            </a:pPr>
+            <a:r>
+              <a:rPr sz="1500">
+                <a:solidFill>
+                  <a:srgbClr val="22282E"/>
+                </a:solidFill>
+              </a:rPr>
+              <a:t>•  Redacta el pretexto. Un correo de "actualización de portal de RRHH" con enlace a tu landing; cuida gramática, firma y coherencia.</a:t>
+            </a:r>
+          </a:p>
+          <a:p>
+            <a:pPr>
+              <a:spcAft>
+                <a:spcPts val="600"/>
+              </a:spcAft>
+            </a:pPr>
+            <a:r>
+              <a:rPr sz="1500">
+                <a:solidFill>
+                  <a:srgbClr val="22282E"/>
+                </a:solidFill>
+              </a:rPr>
+              <a:t>•  Crea la landing page. Clona (en tu lab) la pantalla de login del "portal" y captura credenciales o entrega el payload C2.</a:t>
+            </a:r>
+          </a:p>
+          <a:p>
+            <a:pPr>
+              <a:spcAft>
+                <a:spcPts val="600"/>
+              </a:spcAft>
+            </a:pPr>
+            <a:r>
+              <a:rPr sz="1500">
+                <a:solidFill>
+                  <a:srgbClr val="22282E"/>
+                </a:solidFill>
+              </a:rPr>
+              <a:t>•  Elige la entrega. Compara enviar un .lnk dentro de un .iso (evade MOTW) frente a HTML smuggling; documenta pros/cons de cada uno.</a:t>
+            </a:r>
+          </a:p>
+          <a:p>
+            <a:pPr>
+              <a:spcAft>
+                <a:spcPts val="600"/>
+              </a:spcAft>
+            </a:pPr>
+            <a:r>
+              <a:rPr sz="1500">
+                <a:solidFill>
+                  <a:srgbClr val="22282E"/>
+                </a:solidFill>
+              </a:rPr>
+              <a:t>•  Lanza y mide. Envía a los buzones de laboratorio; en GoPhish observa tasas de apertura, clic y envío de credenciales. Limpia al terminar.</a:t>
             </a:r>
           </a:p>
         </p:txBody>
